--- a/Dia 1/3.-Machine Learning/Algoritmo KNN/Algoritmo KNN.pptx
+++ b/Dia 1/3.-Machine Learning/Algoritmo KNN/Algoritmo KNN.pptx
@@ -272,7 +272,7 @@
           <a:p>
             <a:fld id="{16C30218-1BAE-4E5C-9968-ABB9ABAE3D56}" type="datetimeFigureOut">
               <a:rPr lang="es-MX" smtClean="0"/>
-              <a:t>06/01/2025</a:t>
+              <a:t>13/01/2025</a:t>
             </a:fld>
             <a:endParaRPr lang="es-MX" dirty="0"/>
           </a:p>
@@ -472,7 +472,7 @@
           <a:p>
             <a:fld id="{16C30218-1BAE-4E5C-9968-ABB9ABAE3D56}" type="datetimeFigureOut">
               <a:rPr lang="es-MX" smtClean="0"/>
-              <a:t>06/01/2025</a:t>
+              <a:t>13/01/2025</a:t>
             </a:fld>
             <a:endParaRPr lang="es-MX" dirty="0"/>
           </a:p>
@@ -682,7 +682,7 @@
           <a:p>
             <a:fld id="{16C30218-1BAE-4E5C-9968-ABB9ABAE3D56}" type="datetimeFigureOut">
               <a:rPr lang="es-MX" smtClean="0"/>
-              <a:t>06/01/2025</a:t>
+              <a:t>13/01/2025</a:t>
             </a:fld>
             <a:endParaRPr lang="es-MX" dirty="0"/>
           </a:p>
@@ -882,7 +882,7 @@
           <a:p>
             <a:fld id="{16C30218-1BAE-4E5C-9968-ABB9ABAE3D56}" type="datetimeFigureOut">
               <a:rPr lang="es-MX" smtClean="0"/>
-              <a:t>06/01/2025</a:t>
+              <a:t>13/01/2025</a:t>
             </a:fld>
             <a:endParaRPr lang="es-MX" dirty="0"/>
           </a:p>
@@ -1158,7 +1158,7 @@
           <a:p>
             <a:fld id="{16C30218-1BAE-4E5C-9968-ABB9ABAE3D56}" type="datetimeFigureOut">
               <a:rPr lang="es-MX" smtClean="0"/>
-              <a:t>06/01/2025</a:t>
+              <a:t>13/01/2025</a:t>
             </a:fld>
             <a:endParaRPr lang="es-MX" dirty="0"/>
           </a:p>
@@ -1426,7 +1426,7 @@
           <a:p>
             <a:fld id="{16C30218-1BAE-4E5C-9968-ABB9ABAE3D56}" type="datetimeFigureOut">
               <a:rPr lang="es-MX" smtClean="0"/>
-              <a:t>06/01/2025</a:t>
+              <a:t>13/01/2025</a:t>
             </a:fld>
             <a:endParaRPr lang="es-MX" dirty="0"/>
           </a:p>
@@ -1841,7 +1841,7 @@
           <a:p>
             <a:fld id="{16C30218-1BAE-4E5C-9968-ABB9ABAE3D56}" type="datetimeFigureOut">
               <a:rPr lang="es-MX" smtClean="0"/>
-              <a:t>06/01/2025</a:t>
+              <a:t>13/01/2025</a:t>
             </a:fld>
             <a:endParaRPr lang="es-MX" dirty="0"/>
           </a:p>
@@ -1983,7 +1983,7 @@
           <a:p>
             <a:fld id="{16C30218-1BAE-4E5C-9968-ABB9ABAE3D56}" type="datetimeFigureOut">
               <a:rPr lang="es-MX" smtClean="0"/>
-              <a:t>06/01/2025</a:t>
+              <a:t>13/01/2025</a:t>
             </a:fld>
             <a:endParaRPr lang="es-MX" dirty="0"/>
           </a:p>
@@ -2096,7 +2096,7 @@
           <a:p>
             <a:fld id="{16C30218-1BAE-4E5C-9968-ABB9ABAE3D56}" type="datetimeFigureOut">
               <a:rPr lang="es-MX" smtClean="0"/>
-              <a:t>06/01/2025</a:t>
+              <a:t>13/01/2025</a:t>
             </a:fld>
             <a:endParaRPr lang="es-MX" dirty="0"/>
           </a:p>
@@ -2409,7 +2409,7 @@
           <a:p>
             <a:fld id="{16C30218-1BAE-4E5C-9968-ABB9ABAE3D56}" type="datetimeFigureOut">
               <a:rPr lang="es-MX" smtClean="0"/>
-              <a:t>06/01/2025</a:t>
+              <a:t>13/01/2025</a:t>
             </a:fld>
             <a:endParaRPr lang="es-MX" dirty="0"/>
           </a:p>
@@ -2698,7 +2698,7 @@
           <a:p>
             <a:fld id="{16C30218-1BAE-4E5C-9968-ABB9ABAE3D56}" type="datetimeFigureOut">
               <a:rPr lang="es-MX" smtClean="0"/>
-              <a:t>06/01/2025</a:t>
+              <a:t>13/01/2025</a:t>
             </a:fld>
             <a:endParaRPr lang="es-MX" dirty="0"/>
           </a:p>
@@ -2950,7 +2950,7 @@
           <a:p>
             <a:fld id="{16C30218-1BAE-4E5C-9968-ABB9ABAE3D56}" type="datetimeFigureOut">
               <a:rPr lang="es-MX" smtClean="0"/>
-              <a:t>06/01/2025</a:t>
+              <a:t>13/01/2025</a:t>
             </a:fld>
             <a:endParaRPr lang="es-MX" dirty="0"/>
           </a:p>
@@ -16802,7 +16802,7 @@
         </p:nvSpPr>
         <p:spPr>
           <a:xfrm>
-            <a:off x="2808469" y="3607828"/>
+            <a:off x="2623434" y="3591185"/>
             <a:ext cx="265044" cy="237596"/>
           </a:xfrm>
           <a:prstGeom prst="rect">
@@ -17127,7 +17127,7 @@
                   <a:schemeClr val="tx1"/>
                 </a:solidFill>
               </a:rPr>
-              <a:t>Elegimos K=3</a:t>
+              <a:t>Elegimos K=7</a:t>
             </a:r>
           </a:p>
           <a:p>
@@ -17801,7 +17801,7 @@
         </p:blipFill>
         <p:spPr>
           <a:xfrm>
-            <a:off x="5148800" y="1708920"/>
+            <a:off x="5148800" y="1783307"/>
             <a:ext cx="4537026" cy="4162409"/>
           </a:xfrm>
           <a:prstGeom prst="rect">
